--- a/lectures/Лекция_4_Симметричное_шифрование_Протокол_Диффи_Хелмана.pptx
+++ b/lectures/Лекция_4_Симметричное_шифрование_Протокол_Диффи_Хелмана.pptx
@@ -251,7 +251,7 @@
             <a:fld id="{4F9A4CCB-2AB7-4470-8669-B08666E49AEC}" type="datetimeFigureOut">
               <a:rPr lang="ru-RU" smtClean="0"/>
               <a:pPr/>
-              <a:t>11.11.2025</a:t>
+              <a:t>21.12.2025</a:t>
             </a:fld>
             <a:endParaRPr lang="ru-RU"/>
           </a:p>
@@ -3522,7 +3522,7 @@
             <a:fld id="{168DD3C4-4D9F-471F-B8D8-ADC33A2F85A1}" type="datetime1">
               <a:rPr lang="ru-RU" smtClean="0"/>
               <a:pPr/>
-              <a:t>11.11.2025</a:t>
+              <a:t>21.12.2025</a:t>
             </a:fld>
             <a:endParaRPr lang="ru-RU"/>
           </a:p>
@@ -3687,7 +3687,7 @@
             <a:fld id="{24E3BDCB-15E2-4DB5-85E9-91A0C1B54F67}" type="datetime1">
               <a:rPr lang="ru-RU" smtClean="0"/>
               <a:pPr/>
-              <a:t>11.11.2025</a:t>
+              <a:t>21.12.2025</a:t>
             </a:fld>
             <a:endParaRPr lang="ru-RU"/>
           </a:p>
@@ -3862,7 +3862,7 @@
             <a:fld id="{1BFC1AE0-7255-4FA6-AAAC-B0EE4F1C7F01}" type="datetime1">
               <a:rPr lang="ru-RU" smtClean="0"/>
               <a:pPr/>
-              <a:t>11.11.2025</a:t>
+              <a:t>21.12.2025</a:t>
             </a:fld>
             <a:endParaRPr lang="ru-RU"/>
           </a:p>
@@ -4027,7 +4027,7 @@
             <a:fld id="{4C5B98BF-76AC-42C3-8654-9F1F206953FA}" type="datetime1">
               <a:rPr lang="ru-RU" smtClean="0"/>
               <a:pPr/>
-              <a:t>11.11.2025</a:t>
+              <a:t>21.12.2025</a:t>
             </a:fld>
             <a:endParaRPr lang="ru-RU"/>
           </a:p>
@@ -4269,7 +4269,7 @@
             <a:fld id="{CD18EE70-87C5-41CC-82DC-8C76FDCDCB7E}" type="datetime1">
               <a:rPr lang="ru-RU" smtClean="0"/>
               <a:pPr/>
-              <a:t>11.11.2025</a:t>
+              <a:t>21.12.2025</a:t>
             </a:fld>
             <a:endParaRPr lang="ru-RU"/>
           </a:p>
@@ -4551,7 +4551,7 @@
             <a:fld id="{8F256633-259D-4EC8-884E-C2567AD985AA}" type="datetime1">
               <a:rPr lang="ru-RU" smtClean="0"/>
               <a:pPr/>
-              <a:t>11.11.2025</a:t>
+              <a:t>21.12.2025</a:t>
             </a:fld>
             <a:endParaRPr lang="ru-RU"/>
           </a:p>
@@ -4967,7 +4967,7 @@
             <a:fld id="{9CB4EBE9-DC5A-42FC-A422-9CBA4D69C029}" type="datetime1">
               <a:rPr lang="ru-RU" smtClean="0"/>
               <a:pPr/>
-              <a:t>11.11.2025</a:t>
+              <a:t>21.12.2025</a:t>
             </a:fld>
             <a:endParaRPr lang="ru-RU"/>
           </a:p>
@@ -5081,7 +5081,7 @@
             <a:fld id="{9FBC991C-9657-48E4-960B-5974F82BD171}" type="datetime1">
               <a:rPr lang="ru-RU" smtClean="0"/>
               <a:pPr/>
-              <a:t>11.11.2025</a:t>
+              <a:t>21.12.2025</a:t>
             </a:fld>
             <a:endParaRPr lang="ru-RU"/>
           </a:p>
@@ -5173,7 +5173,7 @@
             <a:fld id="{47DBB673-70A8-4FFF-9AF4-4EC3D77B7B28}" type="datetime1">
               <a:rPr lang="ru-RU" smtClean="0"/>
               <a:pPr/>
-              <a:t>11.11.2025</a:t>
+              <a:t>21.12.2025</a:t>
             </a:fld>
             <a:endParaRPr lang="ru-RU"/>
           </a:p>
@@ -5445,7 +5445,7 @@
             <a:fld id="{05300B48-85CB-43FB-A2EB-BA5EDA8A1B0E}" type="datetime1">
               <a:rPr lang="ru-RU" smtClean="0"/>
               <a:pPr/>
-              <a:t>11.11.2025</a:t>
+              <a:t>21.12.2025</a:t>
             </a:fld>
             <a:endParaRPr lang="ru-RU"/>
           </a:p>
@@ -5694,7 +5694,7 @@
             <a:fld id="{A44AC9CB-2F51-4A77-B020-C5AAC41DE8AE}" type="datetime1">
               <a:rPr lang="ru-RU" smtClean="0"/>
               <a:pPr/>
-              <a:t>11.11.2025</a:t>
+              <a:t>21.12.2025</a:t>
             </a:fld>
             <a:endParaRPr lang="ru-RU"/>
           </a:p>
@@ -5902,7 +5902,7 @@
             <a:fld id="{9D80EF9D-BDD6-43C3-8A2E-7175C2EEB663}" type="datetime1">
               <a:rPr lang="ru-RU" smtClean="0"/>
               <a:pPr/>
-              <a:t>11.11.2025</a:t>
+              <a:t>21.12.2025</a:t>
             </a:fld>
             <a:endParaRPr lang="ru-RU"/>
           </a:p>
@@ -6444,94 +6444,38 @@
                 <a:latin typeface="Times New Roman" pitchFamily="18" charset="0"/>
                 <a:cs typeface="Times New Roman" pitchFamily="18" charset="0"/>
               </a:rPr>
-              <a:t>В соответствии со значениями ключей </a:t>
-            </a:r>
-            <a:r>
-              <a:rPr lang="ru-RU" sz="2400" dirty="0" err="1">
-                <a:latin typeface="Times New Roman" pitchFamily="18" charset="0"/>
-                <a:cs typeface="Times New Roman" pitchFamily="18" charset="0"/>
-              </a:rPr>
-              <a:t>зашифрования</a:t>
+              <a:t>В соответствии со значениями ключей шифрования и расшифрования в современной криптографии различают </a:t>
+            </a:r>
+            <a:r>
+              <a:rPr lang="ru-RU" sz="2400" b="1" dirty="0">
+                <a:latin typeface="Times New Roman" pitchFamily="18" charset="0"/>
+                <a:cs typeface="Times New Roman" pitchFamily="18" charset="0"/>
+              </a:rPr>
+              <a:t>симметричное и асимметричное шифрование</a:t>
             </a:r>
             <a:r>
               <a:rPr lang="ru-RU" sz="2400" dirty="0">
                 <a:latin typeface="Times New Roman" pitchFamily="18" charset="0"/>
                 <a:cs typeface="Times New Roman" pitchFamily="18" charset="0"/>
               </a:rPr>
-              <a:t> и </a:t>
-            </a:r>
-            <a:r>
-              <a:rPr lang="ru-RU" sz="2400" dirty="0" err="1">
-                <a:latin typeface="Times New Roman" pitchFamily="18" charset="0"/>
-                <a:cs typeface="Times New Roman" pitchFamily="18" charset="0"/>
-              </a:rPr>
-              <a:t>расшифрования</a:t>
+              <a:t>.</a:t>
+            </a:r>
+          </a:p>
+          <a:p>
+            <a:pPr indent="450850" algn="just"/>
+            <a:r>
+              <a:rPr lang="ru-RU" sz="2400" b="1" dirty="0">
+                <a:latin typeface="Times New Roman" pitchFamily="18" charset="0"/>
+                <a:cs typeface="Times New Roman" pitchFamily="18" charset="0"/>
+              </a:rPr>
+              <a:t>Симметричное шифрование </a:t>
             </a:r>
             <a:r>
               <a:rPr lang="ru-RU" sz="2400" dirty="0">
                 <a:latin typeface="Times New Roman" pitchFamily="18" charset="0"/>
                 <a:cs typeface="Times New Roman" pitchFamily="18" charset="0"/>
               </a:rPr>
-              <a:t> в современной криптографии различают </a:t>
-            </a:r>
-            <a:r>
-              <a:rPr lang="ru-RU" sz="2400" b="1" dirty="0">
-                <a:latin typeface="Times New Roman" pitchFamily="18" charset="0"/>
-                <a:cs typeface="Times New Roman" pitchFamily="18" charset="0"/>
-              </a:rPr>
-              <a:t>симметричное и асимметричное шифрование</a:t>
-            </a:r>
-            <a:r>
-              <a:rPr lang="ru-RU" sz="2400" dirty="0">
-                <a:latin typeface="Times New Roman" pitchFamily="18" charset="0"/>
-                <a:cs typeface="Times New Roman" pitchFamily="18" charset="0"/>
-              </a:rPr>
-              <a:t>.</a:t>
-            </a:r>
-          </a:p>
-          <a:p>
-            <a:pPr indent="450850" algn="just"/>
-            <a:r>
-              <a:rPr lang="ru-RU" sz="2400" b="1" dirty="0">
-                <a:latin typeface="Times New Roman" pitchFamily="18" charset="0"/>
-                <a:cs typeface="Times New Roman" pitchFamily="18" charset="0"/>
-              </a:rPr>
-              <a:t>Симметричное шифрование </a:t>
-            </a:r>
-            <a:r>
-              <a:rPr lang="ru-RU" sz="2400" dirty="0">
-                <a:latin typeface="Times New Roman" pitchFamily="18" charset="0"/>
-                <a:cs typeface="Times New Roman" pitchFamily="18" charset="0"/>
-              </a:rPr>
-              <a:t>(как для </a:t>
-            </a:r>
-            <a:r>
-              <a:rPr lang="ru-RU" sz="2400" dirty="0" err="1">
-                <a:latin typeface="Times New Roman" pitchFamily="18" charset="0"/>
-                <a:cs typeface="Times New Roman" pitchFamily="18" charset="0"/>
-              </a:rPr>
-              <a:t>зашифрования</a:t>
-            </a:r>
-            <a:r>
-              <a:rPr lang="ru-RU" sz="2400" dirty="0">
-                <a:latin typeface="Times New Roman" pitchFamily="18" charset="0"/>
-                <a:cs typeface="Times New Roman" pitchFamily="18" charset="0"/>
-              </a:rPr>
-              <a:t>, так и для </a:t>
-            </a:r>
-            <a:r>
-              <a:rPr lang="ru-RU" sz="2400" dirty="0" err="1">
-                <a:latin typeface="Times New Roman" pitchFamily="18" charset="0"/>
-                <a:cs typeface="Times New Roman" pitchFamily="18" charset="0"/>
-              </a:rPr>
-              <a:t>расшифрования</a:t>
-            </a:r>
-            <a:r>
-              <a:rPr lang="ru-RU" sz="2400" dirty="0">
-                <a:latin typeface="Times New Roman" pitchFamily="18" charset="0"/>
-                <a:cs typeface="Times New Roman" pitchFamily="18" charset="0"/>
-              </a:rPr>
-              <a:t>) использует либо одинаковые ключи, либо ключи, у которых знание одного из них позволяет легко найти другой.</a:t>
+              <a:t>(как для шифрования, так и для расшифрования) использует либо одинаковые ключи, либо ключи, у которых знание одного из них позволяет легко найти другой.</a:t>
             </a:r>
           </a:p>
           <a:p>
@@ -8547,7 +8491,7 @@
                 <a:latin typeface="Times New Roman" pitchFamily="18" charset="0"/>
                 <a:cs typeface="Times New Roman" pitchFamily="18" charset="0"/>
               </a:rPr>
-              <a:t>А</a:t>
+              <a:t>А</a:t>
             </a:r>
             <a:r>
               <a:rPr lang="ru-RU" sz="2800" dirty="0">
@@ -8561,13 +8505,6 @@
             <a:pPr marL="0" indent="355600" algn="just">
               <a:buNone/>
             </a:pPr>
-            <a:r>
-              <a:rPr lang="ru-RU" sz="2800" dirty="0">
-                <a:latin typeface="Times New Roman" pitchFamily="18" charset="0"/>
-                <a:cs typeface="Times New Roman" pitchFamily="18" charset="0"/>
-              </a:rPr>
-              <a:t></a:t>
-            </a:r>
             <a:r>
               <a:rPr lang="ru-RU" sz="2800" b="1" dirty="0">
                 <a:latin typeface="Times New Roman" pitchFamily="18" charset="0"/>
@@ -13659,7 +13596,21 @@
                 <a:latin typeface="Times New Roman" pitchFamily="18" charset="0"/>
                 <a:cs typeface="Times New Roman" pitchFamily="18" charset="0"/>
               </a:rPr>
-              <a:t>обеспечение конфиденциальности данных </a:t>
+              <a:t>обеспечение</a:t>
+            </a:r>
+            <a:r>
+              <a:rPr lang="en-US" sz="2400" b="1" dirty="0">
+                <a:latin typeface="Times New Roman" pitchFamily="18" charset="0"/>
+                <a:cs typeface="Times New Roman" pitchFamily="18" charset="0"/>
+              </a:rPr>
+              <a:t> </a:t>
+            </a:r>
+            <a:r>
+              <a:rPr lang="ru-RU" sz="2400" b="1" dirty="0">
+                <a:latin typeface="Times New Roman" pitchFamily="18" charset="0"/>
+                <a:cs typeface="Times New Roman" pitchFamily="18" charset="0"/>
+              </a:rPr>
+              <a:t>конфиденциальности данных </a:t>
             </a:r>
             <a:r>
               <a:rPr lang="ru-RU" sz="2400" dirty="0">
@@ -14036,21 +13987,7 @@
                 <a:latin typeface="Times New Roman" pitchFamily="18" charset="0"/>
                 <a:cs typeface="Times New Roman" pitchFamily="18" charset="0"/>
               </a:rPr>
-              <a:t>Процесс шифрования, или </a:t>
-            </a:r>
-            <a:r>
-              <a:rPr lang="ru-RU" sz="2400" dirty="0" err="1">
-                <a:latin typeface="Times New Roman" pitchFamily="18" charset="0"/>
-                <a:cs typeface="Times New Roman" pitchFamily="18" charset="0"/>
-              </a:rPr>
-              <a:t>зашифрования</a:t>
-            </a:r>
-            <a:r>
-              <a:rPr lang="ru-RU" sz="2400" dirty="0">
-                <a:latin typeface="Times New Roman" pitchFamily="18" charset="0"/>
-                <a:cs typeface="Times New Roman" pitchFamily="18" charset="0"/>
-              </a:rPr>
-              <a:t>, включает в себя следующие </a:t>
+              <a:t>Процесс шифрования включает в себя следующие </a:t>
             </a:r>
             <a:r>
               <a:rPr lang="ru-RU" sz="2400" b="1" dirty="0">
@@ -14287,21 +14224,7 @@
                 <a:latin typeface="Times New Roman" pitchFamily="18" charset="0"/>
                 <a:cs typeface="Times New Roman" pitchFamily="18" charset="0"/>
               </a:rPr>
-              <a:t>Процесс </a:t>
-            </a:r>
-            <a:r>
-              <a:rPr lang="ru-RU" sz="2400" dirty="0" err="1">
-                <a:latin typeface="Times New Roman" pitchFamily="18" charset="0"/>
-                <a:cs typeface="Times New Roman" pitchFamily="18" charset="0"/>
-              </a:rPr>
-              <a:t>зашифрования</a:t>
-            </a:r>
-            <a:r>
-              <a:rPr lang="ru-RU" sz="2400" dirty="0">
-                <a:latin typeface="Times New Roman" pitchFamily="18" charset="0"/>
-                <a:cs typeface="Times New Roman" pitchFamily="18" charset="0"/>
-              </a:rPr>
-              <a:t> можно выразить следующей формулой:</a:t>
+              <a:t>Процесс шифрования можно выразить следующей формулой:</a:t>
             </a:r>
             <a:endParaRPr lang="en-US" sz="2400" dirty="0">
               <a:latin typeface="Times New Roman" pitchFamily="18" charset="0"/>
@@ -14617,35 +14540,7 @@
                 <a:latin typeface="Times New Roman" pitchFamily="18" charset="0"/>
                 <a:cs typeface="Times New Roman" pitchFamily="18" charset="0"/>
               </a:rPr>
-              <a:t>Алгоритмы </a:t>
-            </a:r>
-            <a:r>
-              <a:rPr lang="ru-RU" sz="2400" dirty="0" err="1">
-                <a:latin typeface="Times New Roman" pitchFamily="18" charset="0"/>
-                <a:cs typeface="Times New Roman" pitchFamily="18" charset="0"/>
-              </a:rPr>
-              <a:t>зашифрования</a:t>
-            </a:r>
-            <a:r>
-              <a:rPr lang="ru-RU" sz="2400" dirty="0">
-                <a:latin typeface="Times New Roman" pitchFamily="18" charset="0"/>
-                <a:cs typeface="Times New Roman" pitchFamily="18" charset="0"/>
-              </a:rPr>
-              <a:t> и </a:t>
-            </a:r>
-            <a:r>
-              <a:rPr lang="ru-RU" sz="2400" dirty="0" err="1">
-                <a:latin typeface="Times New Roman" pitchFamily="18" charset="0"/>
-                <a:cs typeface="Times New Roman" pitchFamily="18" charset="0"/>
-              </a:rPr>
-              <a:t>расшифрования</a:t>
-            </a:r>
-            <a:r>
-              <a:rPr lang="ru-RU" sz="2400" dirty="0">
-                <a:latin typeface="Times New Roman" pitchFamily="18" charset="0"/>
-                <a:cs typeface="Times New Roman" pitchFamily="18" charset="0"/>
-              </a:rPr>
-              <a:t> должны удовлетворять следующему равенству:</a:t>
+              <a:t>Алгоритмы шифрования и расшифрования должны удовлетворять следующему равенству:</a:t>
             </a:r>
             <a:endParaRPr lang="en-US" sz="2400" dirty="0">
               <a:latin typeface="Times New Roman" pitchFamily="18" charset="0"/>
@@ -14711,35 +14606,7 @@
                 <a:latin typeface="Times New Roman" pitchFamily="18" charset="0"/>
                 <a:cs typeface="Times New Roman" pitchFamily="18" charset="0"/>
               </a:rPr>
-              <a:t> для алгоритмов </a:t>
-            </a:r>
-            <a:r>
-              <a:rPr lang="ru-RU" sz="2400" dirty="0" err="1">
-                <a:latin typeface="Times New Roman" pitchFamily="18" charset="0"/>
-                <a:cs typeface="Times New Roman" pitchFamily="18" charset="0"/>
-              </a:rPr>
-              <a:t>расшифрования</a:t>
-            </a:r>
-            <a:r>
-              <a:rPr lang="ru-RU" sz="2400" dirty="0">
-                <a:latin typeface="Times New Roman" pitchFamily="18" charset="0"/>
-                <a:cs typeface="Times New Roman" pitchFamily="18" charset="0"/>
-              </a:rPr>
-              <a:t> и </a:t>
-            </a:r>
-            <a:r>
-              <a:rPr lang="ru-RU" sz="2400" dirty="0" err="1">
-                <a:latin typeface="Times New Roman" pitchFamily="18" charset="0"/>
-                <a:cs typeface="Times New Roman" pitchFamily="18" charset="0"/>
-              </a:rPr>
-              <a:t>зашифрования</a:t>
-            </a:r>
-            <a:r>
-              <a:rPr lang="ru-RU" sz="2400" dirty="0">
-                <a:latin typeface="Times New Roman" pitchFamily="18" charset="0"/>
-                <a:cs typeface="Times New Roman" pitchFamily="18" charset="0"/>
-              </a:rPr>
-              <a:t>.</a:t>
+              <a:t> для алгоритмов расшифрования и шифрования.</a:t>
             </a:r>
           </a:p>
         </p:txBody>
